--- a/data/employees/EMP078/AST-EMP078-01.pptx
+++ b/data/employees/EMP078/AST-EMP078-01.pptx
@@ -9,6 +9,7 @@
     <p:sldId id="257" r:id="rId8"/>
     <p:sldId id="258" r:id="rId9"/>
     <p:sldId id="259" r:id="rId10"/>
+    <p:sldId id="260" r:id="rId11"/>
   </p:sldIdLst>
   <p:sldSz cx="9144000" cy="6858000" type="screen4x3"/>
   <p:notesSz cx="6858000" cy="9144000"/>
@@ -3098,42 +3099,55 @@
             <a:spLocks noGrp="1"/>
           </p:cNvSpPr>
           <p:nvPr>
-            <p:ph type="ctrTitle"/>
-          </p:nvPr>
-        </p:nvSpPr>
-        <p:spPr/>
-        <p:txBody>
-          <a:bodyPr/>
-          <a:lstStyle/>
-          <a:p>
-            <a:r>
-              <a:t>Project update deck - EMP078</a:t>
-            </a:r>
-          </a:p>
-        </p:txBody>
-      </p:sp>
-      <p:sp>
-        <p:nvSpPr>
-          <p:cNvPr id="3" name="Subtitle 2"/>
-          <p:cNvSpPr>
-            <a:spLocks noGrp="1"/>
-          </p:cNvSpPr>
-          <p:nvPr>
-            <p:ph type="subTitle" idx="1"/>
-          </p:nvPr>
-        </p:nvSpPr>
-        <p:spPr/>
-        <p:txBody>
-          <a:bodyPr/>
-          <a:lstStyle/>
-          <a:p>
-            <a:r>
-              <a:t>Jamie Brown | Specialist | Operations</a:t>
-            </a:r>
-          </a:p>
-          <a:p>
-            <a:r>
-              <a:t>Prepared: 2025-03-21</a:t>
+            <p:ph type="title"/>
+          </p:nvPr>
+        </p:nvSpPr>
+        <p:spPr/>
+        <p:txBody>
+          <a:bodyPr/>
+          <a:lstStyle/>
+          <a:p>
+            <a:r>
+              <a:t>Ast Emp078 01 - EMP078</a:t>
+            </a:r>
+          </a:p>
+        </p:txBody>
+      </p:sp>
+      <p:sp>
+        <p:nvSpPr>
+          <p:cNvPr id="3" name="Content Placeholder 2"/>
+          <p:cNvSpPr>
+            <a:spLocks noGrp="1"/>
+          </p:cNvSpPr>
+          <p:nvPr>
+            <p:ph idx="1"/>
+          </p:nvPr>
+        </p:nvSpPr>
+        <p:spPr/>
+        <p:txBody>
+          <a:bodyPr/>
+          <a:lstStyle/>
+          <a:p>
+            <a:r>
+              <a:t>Slide 1: Executive Summary</a:t>
+            </a:r>
+          </a:p>
+          <a:p>
+            <a:pPr lvl="1"/>
+            <a:r>
+              <a:t>Section 1: Knowledge transfer and onboarding. EMP078 contributes to ast emp078 01 through recurring collaboration, clear ownership boundaries, and measurable outcomes. The team captures decisions, open issues, and handoffs so that knowledge remains discoverable for future programs.</a:t>
+            </a:r>
+          </a:p>
+          <a:p>
+            <a:pPr lvl="1"/>
+            <a:r>
+              <a:t>Section 2: Fabric semantic model planning. EMP078 contributes to ast emp078 01 through recurring collaboration, clear ownership boundaries, and measurable outcomes. The team captures decisions, open issues, and handoffs so that knowledge remains discoverable for future programs.</a:t>
+            </a:r>
+          </a:p>
+          <a:p>
+            <a:pPr lvl="1"/>
+            <a:r>
+              <a:t>Section 3: Quarterly delivery milestones. EMP078 contributes to ast emp078 01 through recurring collaboration, clear ownership boundaries, and measurable outcomes. The team captures decisions, open issues, and handoffs so that knowledge remains discoverable for future programs.</a:t>
             </a:r>
           </a:p>
         </p:txBody>
@@ -3172,7 +3186,7 @@
           <a:lstStyle/>
           <a:p>
             <a:r>
-              <a:t>Shift Productivity Dashboard</a:t>
+              <a:t>Ast Emp078 01 - EMP078</a:t>
             </a:r>
           </a:p>
         </p:txBody>
@@ -3193,17 +3207,25 @@
           <a:lstStyle/>
           <a:p>
             <a:r>
-              <a:t>Overview of Shift Productivity Dashboard for Operations department.</a:t>
-            </a:r>
-          </a:p>
-          <a:p>
-            <a:r>
-              <a:t>Responsible: Jamie Brown (Specialist)</a:t>
-            </a:r>
-          </a:p>
-          <a:p>
-            <a:r>
-              <a:t>Location: Portland | Skills: Azure AI, Fabric, TypeScript, Kusto</a:t>
+              <a:t>Slide 2: Executive Summary</a:t>
+            </a:r>
+          </a:p>
+          <a:p>
+            <a:pPr lvl="1"/>
+            <a:r>
+              <a:t>Section 1: Data quality remediation. EMP078 contributes to ast emp078 01 through recurring collaboration, clear ownership boundaries, and measurable outcomes. The team captures decisions, open issues, and handoffs so that knowledge remains discoverable for future programs.</a:t>
+            </a:r>
+          </a:p>
+          <a:p>
+            <a:pPr lvl="1"/>
+            <a:r>
+              <a:t>Section 2: Data quality remediation. EMP078 contributes to ast emp078 01 through recurring collaboration, clear ownership boundaries, and measurable outcomes. The team captures decisions, open issues, and handoffs so that knowledge remains discoverable for future programs.</a:t>
+            </a:r>
+          </a:p>
+          <a:p>
+            <a:pPr lvl="1"/>
+            <a:r>
+              <a:t>Section 3: Customer escalation analysis. EMP078 contributes to ast emp078 01 through recurring collaboration, clear ownership boundaries, and measurable outcomes. The team captures decisions, open issues, and handoffs so that knowledge remains discoverable for future programs.</a:t>
             </a:r>
           </a:p>
         </p:txBody>
@@ -3242,7 +3264,7 @@
           <a:lstStyle/>
           <a:p>
             <a:r>
-              <a:t>Throughput vs. Target</a:t>
+              <a:t>Ast Emp078 01 - EMP078</a:t>
             </a:r>
           </a:p>
         </p:txBody>
@@ -3263,17 +3285,25 @@
           <a:lstStyle/>
           <a:p>
             <a:r>
-              <a:t>Overview of Throughput vs. Target for Operations department.</a:t>
-            </a:r>
-          </a:p>
-          <a:p>
-            <a:r>
-              <a:t>Responsible: Jamie Brown (Specialist)</a:t>
-            </a:r>
-          </a:p>
-          <a:p>
-            <a:r>
-              <a:t>Location: Portland | Skills: Azure AI, Fabric, TypeScript, Kusto</a:t>
+              <a:t>Slide 3: Executive Summary</a:t>
+            </a:r>
+          </a:p>
+          <a:p>
+            <a:pPr lvl="1"/>
+            <a:r>
+              <a:t>Section 1: Quarterly delivery milestones. EMP078 contributes to ast emp078 01 through recurring collaboration, clear ownership boundaries, and measurable outcomes. The team captures decisions, open issues, and handoffs so that knowledge remains discoverable for future programs.</a:t>
+            </a:r>
+          </a:p>
+          <a:p>
+            <a:pPr lvl="1"/>
+            <a:r>
+              <a:t>Section 2: Fabric semantic model planning. EMP078 contributes to ast emp078 01 through recurring collaboration, clear ownership boundaries, and measurable outcomes. The team captures decisions, open issues, and handoffs so that knowledge remains discoverable for future programs.</a:t>
+            </a:r>
+          </a:p>
+          <a:p>
+            <a:pPr lvl="1"/>
+            <a:r>
+              <a:t>Section 3: Data quality remediation. EMP078 contributes to ast emp078 01 through recurring collaboration, clear ownership boundaries, and measurable outcomes. The team captures decisions, open issues, and handoffs so that knowledge remains discoverable for future programs.</a:t>
             </a:r>
           </a:p>
         </p:txBody>
@@ -3312,7 +3342,7 @@
           <a:lstStyle/>
           <a:p>
             <a:r>
-              <a:t>Incident Response Metrics</a:t>
+              <a:t>Ast Emp078 01 - EMP078</a:t>
             </a:r>
           </a:p>
         </p:txBody>
@@ -3333,17 +3363,103 @@
           <a:lstStyle/>
           <a:p>
             <a:r>
-              <a:t>Overview of Incident Response Metrics for Operations department.</a:t>
-            </a:r>
-          </a:p>
-          <a:p>
-            <a:r>
-              <a:t>Responsible: Jamie Brown (Specialist)</a:t>
-            </a:r>
-          </a:p>
-          <a:p>
-            <a:r>
-              <a:t>Location: Portland | Skills: Azure AI, Fabric, TypeScript, Kusto</a:t>
+              <a:t>Slide 4: Executive Summary</a:t>
+            </a:r>
+          </a:p>
+          <a:p>
+            <a:pPr lvl="1"/>
+            <a:r>
+              <a:t>Section 1: Knowledge transfer and onboarding. EMP078 contributes to ast emp078 01 through recurring collaboration, clear ownership boundaries, and measurable outcomes. The team captures decisions, open issues, and handoffs so that knowledge remains discoverable for future programs.</a:t>
+            </a:r>
+          </a:p>
+          <a:p>
+            <a:pPr lvl="1"/>
+            <a:r>
+              <a:t>Section 2: Data quality remediation. EMP078 contributes to ast emp078 01 through recurring collaboration, clear ownership boundaries, and measurable outcomes. The team captures decisions, open issues, and handoffs so that knowledge remains discoverable for future programs.</a:t>
+            </a:r>
+          </a:p>
+          <a:p>
+            <a:pPr lvl="1"/>
+            <a:r>
+              <a:t>Section 3: Fabric semantic model planning. EMP078 contributes to ast emp078 01 through recurring collaboration, clear ownership boundaries, and measurable outcomes. The team captures decisions, open issues, and handoffs so that knowledge remains discoverable for future programs.</a:t>
+            </a:r>
+          </a:p>
+        </p:txBody>
+      </p:sp>
+    </p:spTree>
+  </p:cSld>
+  <p:clrMapOvr>
+    <a:masterClrMapping/>
+  </p:clrMapOvr>
+</p:sld>
+</file>
+
+<file path=ppt/slides/slide5.xml><?xml version="1.0" encoding="utf-8"?>
+<p:sld xmlns:a="http://schemas.openxmlformats.org/drawingml/2006/main" xmlns:p="http://schemas.openxmlformats.org/presentationml/2006/main" xmlns:r="http://schemas.openxmlformats.org/officeDocument/2006/relationships">
+  <p:cSld>
+    <p:spTree>
+      <p:nvGrpSpPr>
+        <p:cNvPr id="1" name=""/>
+        <p:cNvGrpSpPr/>
+        <p:nvPr/>
+      </p:nvGrpSpPr>
+      <p:grpSpPr/>
+      <p:sp>
+        <p:nvSpPr>
+          <p:cNvPr id="2" name="Title 1"/>
+          <p:cNvSpPr>
+            <a:spLocks noGrp="1"/>
+          </p:cNvSpPr>
+          <p:nvPr>
+            <p:ph type="title"/>
+          </p:nvPr>
+        </p:nvSpPr>
+        <p:spPr/>
+        <p:txBody>
+          <a:bodyPr/>
+          <a:lstStyle/>
+          <a:p>
+            <a:r>
+              <a:t>Ast Emp078 01 - EMP078</a:t>
+            </a:r>
+          </a:p>
+        </p:txBody>
+      </p:sp>
+      <p:sp>
+        <p:nvSpPr>
+          <p:cNvPr id="3" name="Content Placeholder 2"/>
+          <p:cNvSpPr>
+            <a:spLocks noGrp="1"/>
+          </p:cNvSpPr>
+          <p:nvPr>
+            <p:ph idx="1"/>
+          </p:nvPr>
+        </p:nvSpPr>
+        <p:spPr/>
+        <p:txBody>
+          <a:bodyPr/>
+          <a:lstStyle/>
+          <a:p>
+            <a:r>
+              <a:t>Slide 5: Executive Summary</a:t>
+            </a:r>
+          </a:p>
+          <a:p>
+            <a:pPr lvl="1"/>
+            <a:r>
+              <a:t>Section 1: Knowledge transfer and onboarding. EMP078 contributes to ast emp078 01 through recurring collaboration, clear ownership boundaries, and measurable outcomes. The team captures decisions, open issues, and handoffs so that knowledge remains discoverable for future programs.</a:t>
+            </a:r>
+          </a:p>
+          <a:p>
+            <a:pPr lvl="1"/>
+            <a:r>
+              <a:t>Section 2: Automation backlog refinement. EMP078 contributes to ast emp078 01 through recurring collaboration, clear ownership boundaries, and measurable outcomes. The team captures decisions, open issues, and handoffs so that knowledge remains discoverable for future programs.</a:t>
+            </a:r>
+          </a:p>
+          <a:p>
+            <a:pPr lvl="1"/>
+            <a:r>
+              <a:t>Section 3: Knowledge transfer and onboarding. EMP078 contributes to ast emp078 01 through recurring collaboration, clear ownership boundaries, and measurable outcomes. The team captures decisions, open issues, and handoffs so that knowledge remains discoverable for future programs.</a:t>
             </a:r>
           </a:p>
         </p:txBody>
